--- a/fig_new/Fig.pptx
+++ b/fig_new/Fig.pptx
@@ -6,6 +6,7 @@
   </p:sldMasterIdLst>
   <p:sldIdLst>
     <p:sldId id="256" r:id="rId2"/>
+    <p:sldId id="487" r:id="rId3"/>
   </p:sldIdLst>
   <p:sldSz cx="12192000" cy="6858000"/>
   <p:notesSz cx="6858000" cy="9144000"/>
@@ -104,6 +105,11 @@
       </a:defRPr>
     </a:lvl9pPr>
   </p:defaultTextStyle>
+  <p:extLst>
+    <p:ext uri="{EFAFB233-063F-42B5-8137-9DF3F51BA10A}">
+      <p15:sldGuideLst xmlns:p15="http://schemas.microsoft.com/office/powerpoint/2012/main"/>
+    </p:ext>
+  </p:extLst>
 </p:presentation>
 </file>
 
@@ -254,7 +260,7 @@
           <a:p>
             <a:fld id="{8F212B83-356B-4C90-B6C1-92806F2207B4}" type="datetimeFigureOut">
               <a:rPr kumimoji="1" lang="ja-JP" altLang="en-US" smtClean="0"/>
-              <a:t>2026/5/14</a:t>
+              <a:t>2026/5/25</a:t>
             </a:fld>
             <a:endParaRPr kumimoji="1" lang="ja-JP" altLang="en-US"/>
           </a:p>
@@ -484,7 +490,7 @@
           <a:p>
             <a:fld id="{8F212B83-356B-4C90-B6C1-92806F2207B4}" type="datetimeFigureOut">
               <a:rPr kumimoji="1" lang="ja-JP" altLang="en-US" smtClean="0"/>
-              <a:t>2026/5/14</a:t>
+              <a:t>2026/5/25</a:t>
             </a:fld>
             <a:endParaRPr kumimoji="1" lang="ja-JP" altLang="en-US"/>
           </a:p>
@@ -724,7 +730,7 @@
           <a:p>
             <a:fld id="{8F212B83-356B-4C90-B6C1-92806F2207B4}" type="datetimeFigureOut">
               <a:rPr kumimoji="1" lang="ja-JP" altLang="en-US" smtClean="0"/>
-              <a:t>2026/5/14</a:t>
+              <a:t>2026/5/25</a:t>
             </a:fld>
             <a:endParaRPr kumimoji="1" lang="ja-JP" altLang="en-US"/>
           </a:p>
@@ -954,7 +960,7 @@
           <a:p>
             <a:fld id="{8F212B83-356B-4C90-B6C1-92806F2207B4}" type="datetimeFigureOut">
               <a:rPr kumimoji="1" lang="ja-JP" altLang="en-US" smtClean="0"/>
-              <a:t>2026/5/14</a:t>
+              <a:t>2026/5/25</a:t>
             </a:fld>
             <a:endParaRPr kumimoji="1" lang="ja-JP" altLang="en-US"/>
           </a:p>
@@ -1229,7 +1235,7 @@
           <a:p>
             <a:fld id="{8F212B83-356B-4C90-B6C1-92806F2207B4}" type="datetimeFigureOut">
               <a:rPr kumimoji="1" lang="ja-JP" altLang="en-US" smtClean="0"/>
-              <a:t>2026/5/14</a:t>
+              <a:t>2026/5/25</a:t>
             </a:fld>
             <a:endParaRPr kumimoji="1" lang="ja-JP" altLang="en-US"/>
           </a:p>
@@ -1558,7 +1564,7 @@
           <a:p>
             <a:fld id="{8F212B83-356B-4C90-B6C1-92806F2207B4}" type="datetimeFigureOut">
               <a:rPr kumimoji="1" lang="ja-JP" altLang="en-US" smtClean="0"/>
-              <a:t>2026/5/14</a:t>
+              <a:t>2026/5/25</a:t>
             </a:fld>
             <a:endParaRPr kumimoji="1" lang="ja-JP" altLang="en-US"/>
           </a:p>
@@ -2034,7 +2040,7 @@
           <a:p>
             <a:fld id="{8F212B83-356B-4C90-B6C1-92806F2207B4}" type="datetimeFigureOut">
               <a:rPr kumimoji="1" lang="ja-JP" altLang="en-US" smtClean="0"/>
-              <a:t>2026/5/14</a:t>
+              <a:t>2026/5/25</a:t>
             </a:fld>
             <a:endParaRPr kumimoji="1" lang="ja-JP" altLang="en-US"/>
           </a:p>
@@ -2175,7 +2181,7 @@
           <a:p>
             <a:fld id="{8F212B83-356B-4C90-B6C1-92806F2207B4}" type="datetimeFigureOut">
               <a:rPr kumimoji="1" lang="ja-JP" altLang="en-US" smtClean="0"/>
-              <a:t>2026/5/14</a:t>
+              <a:t>2026/5/25</a:t>
             </a:fld>
             <a:endParaRPr kumimoji="1" lang="ja-JP" altLang="en-US"/>
           </a:p>
@@ -2288,7 +2294,7 @@
           <a:p>
             <a:fld id="{8F212B83-356B-4C90-B6C1-92806F2207B4}" type="datetimeFigureOut">
               <a:rPr kumimoji="1" lang="ja-JP" altLang="en-US" smtClean="0"/>
-              <a:t>2026/5/14</a:t>
+              <a:t>2026/5/25</a:t>
             </a:fld>
             <a:endParaRPr kumimoji="1" lang="ja-JP" altLang="en-US"/>
           </a:p>
@@ -2631,7 +2637,7 @@
           <a:p>
             <a:fld id="{8F212B83-356B-4C90-B6C1-92806F2207B4}" type="datetimeFigureOut">
               <a:rPr kumimoji="1" lang="ja-JP" altLang="en-US" smtClean="0"/>
-              <a:t>2026/5/14</a:t>
+              <a:t>2026/5/25</a:t>
             </a:fld>
             <a:endParaRPr kumimoji="1" lang="ja-JP" altLang="en-US"/>
           </a:p>
@@ -2919,7 +2925,7 @@
           <a:p>
             <a:fld id="{8F212B83-356B-4C90-B6C1-92806F2207B4}" type="datetimeFigureOut">
               <a:rPr kumimoji="1" lang="ja-JP" altLang="en-US" smtClean="0"/>
-              <a:t>2026/5/14</a:t>
+              <a:t>2026/5/25</a:t>
             </a:fld>
             <a:endParaRPr kumimoji="1" lang="ja-JP" altLang="en-US"/>
           </a:p>
@@ -3192,7 +3198,7 @@
           <a:p>
             <a:fld id="{8F212B83-356B-4C90-B6C1-92806F2207B4}" type="datetimeFigureOut">
               <a:rPr kumimoji="1" lang="ja-JP" altLang="en-US" smtClean="0"/>
-              <a:t>2026/5/14</a:t>
+              <a:t>2026/5/25</a:t>
             </a:fld>
             <a:endParaRPr kumimoji="1" lang="ja-JP" altLang="en-US"/>
           </a:p>
@@ -3609,6 +3615,110 @@
           <a:chExt cx="0" cy="0"/>
         </a:xfrm>
       </p:grpSpPr>
+      <p:sp>
+        <p:nvSpPr>
+          <p:cNvPr id="3" name="正方形/長方形 2">
+            <a:extLst>
+              <a:ext uri="{FF2B5EF4-FFF2-40B4-BE49-F238E27FC236}">
+                <a16:creationId xmlns:a16="http://schemas.microsoft.com/office/drawing/2014/main" id="{3C97D722-21DA-E74B-AC7F-A096B930E6FE}"/>
+              </a:ext>
+            </a:extLst>
+          </p:cNvPr>
+          <p:cNvSpPr/>
+          <p:nvPr/>
+        </p:nvSpPr>
+        <p:spPr>
+          <a:xfrm>
+            <a:off x="1145894" y="3602191"/>
+            <a:ext cx="9525964" cy="3087975"/>
+          </a:xfrm>
+          <a:prstGeom prst="rect">
+            <a:avLst/>
+          </a:prstGeom>
+          <a:solidFill>
+            <a:schemeClr val="bg1"/>
+          </a:solidFill>
+          <a:ln>
+            <a:noFill/>
+          </a:ln>
+        </p:spPr>
+        <p:style>
+          <a:lnRef idx="2">
+            <a:schemeClr val="accent1">
+              <a:shade val="50000"/>
+            </a:schemeClr>
+          </a:lnRef>
+          <a:fillRef idx="1">
+            <a:schemeClr val="accent1"/>
+          </a:fillRef>
+          <a:effectRef idx="0">
+            <a:schemeClr val="accent1"/>
+          </a:effectRef>
+          <a:fontRef idx="minor">
+            <a:schemeClr val="lt1"/>
+          </a:fontRef>
+        </p:style>
+        <p:txBody>
+          <a:bodyPr rtlCol="0" anchor="ctr"/>
+          <a:lstStyle/>
+          <a:p>
+            <a:pPr algn="ctr"/>
+            <a:endParaRPr kumimoji="1" lang="ja-JP" altLang="en-US"/>
+          </a:p>
+        </p:txBody>
+      </p:sp>
+      <p:sp>
+        <p:nvSpPr>
+          <p:cNvPr id="2" name="正方形/長方形 1">
+            <a:extLst>
+              <a:ext uri="{FF2B5EF4-FFF2-40B4-BE49-F238E27FC236}">
+                <a16:creationId xmlns:a16="http://schemas.microsoft.com/office/drawing/2014/main" id="{32234381-F04D-A048-B83C-75035BACB187}"/>
+              </a:ext>
+            </a:extLst>
+          </p:cNvPr>
+          <p:cNvSpPr/>
+          <p:nvPr/>
+        </p:nvSpPr>
+        <p:spPr>
+          <a:xfrm>
+            <a:off x="3067291" y="1003030"/>
+            <a:ext cx="4560425" cy="2561590"/>
+          </a:xfrm>
+          <a:prstGeom prst="rect">
+            <a:avLst/>
+          </a:prstGeom>
+          <a:solidFill>
+            <a:schemeClr val="bg1"/>
+          </a:solidFill>
+          <a:ln>
+            <a:noFill/>
+          </a:ln>
+        </p:spPr>
+        <p:style>
+          <a:lnRef idx="2">
+            <a:schemeClr val="accent1">
+              <a:shade val="50000"/>
+            </a:schemeClr>
+          </a:lnRef>
+          <a:fillRef idx="1">
+            <a:schemeClr val="accent1"/>
+          </a:fillRef>
+          <a:effectRef idx="0">
+            <a:schemeClr val="accent1"/>
+          </a:effectRef>
+          <a:fontRef idx="minor">
+            <a:schemeClr val="lt1"/>
+          </a:fontRef>
+        </p:style>
+        <p:txBody>
+          <a:bodyPr rtlCol="0" anchor="ctr"/>
+          <a:lstStyle/>
+          <a:p>
+            <a:pPr algn="ctr"/>
+            <a:endParaRPr kumimoji="1" lang="ja-JP" altLang="en-US"/>
+          </a:p>
+        </p:txBody>
+      </p:sp>
       <p:grpSp>
         <p:nvGrpSpPr>
           <p:cNvPr id="18" name="グループ化 17">
@@ -3948,10 +4058,1846 @@
           </p:txBody>
         </p:sp>
       </p:grpSp>
+      <p:grpSp>
+        <p:nvGrpSpPr>
+          <p:cNvPr id="21" name="グループ化 20">
+            <a:extLst>
+              <a:ext uri="{FF2B5EF4-FFF2-40B4-BE49-F238E27FC236}">
+                <a16:creationId xmlns:a16="http://schemas.microsoft.com/office/drawing/2014/main" id="{41CF1E31-91E1-1AEC-856F-45F2F98F08A6}"/>
+              </a:ext>
+            </a:extLst>
+          </p:cNvPr>
+          <p:cNvGrpSpPr/>
+          <p:nvPr/>
+        </p:nvGrpSpPr>
+        <p:grpSpPr>
+          <a:xfrm>
+            <a:off x="1394994" y="3853056"/>
+            <a:ext cx="8929438" cy="2561590"/>
+            <a:chOff x="1146745" y="3768071"/>
+            <a:chExt cx="8929438" cy="2561590"/>
+          </a:xfrm>
+        </p:grpSpPr>
+        <p:pic>
+          <p:nvPicPr>
+            <p:cNvPr id="19" name="図 18">
+              <a:extLst>
+                <a:ext uri="{FF2B5EF4-FFF2-40B4-BE49-F238E27FC236}">
+                  <a16:creationId xmlns:a16="http://schemas.microsoft.com/office/drawing/2014/main" id="{E809579F-7CFC-4288-2552-F73FFBF62229}"/>
+                </a:ext>
+              </a:extLst>
+            </p:cNvPr>
+            <p:cNvPicPr>
+              <a:picLocks noChangeAspect="1"/>
+            </p:cNvPicPr>
+            <p:nvPr/>
+          </p:nvPicPr>
+          <p:blipFill>
+            <a:blip r:embed="rId3"/>
+            <a:stretch>
+              <a:fillRect/>
+            </a:stretch>
+          </p:blipFill>
+          <p:spPr>
+            <a:xfrm>
+              <a:off x="1146745" y="4267200"/>
+              <a:ext cx="3656902" cy="1774025"/>
+            </a:xfrm>
+            <a:prstGeom prst="rect">
+              <a:avLst/>
+            </a:prstGeom>
+          </p:spPr>
+        </p:pic>
+        <p:pic>
+          <p:nvPicPr>
+            <p:cNvPr id="20" name="図 19">
+              <a:extLst>
+                <a:ext uri="{FF2B5EF4-FFF2-40B4-BE49-F238E27FC236}">
+                  <a16:creationId xmlns:a16="http://schemas.microsoft.com/office/drawing/2014/main" id="{91C4EEB6-5E4B-66E6-C535-B093244FBF35}"/>
+                </a:ext>
+              </a:extLst>
+            </p:cNvPr>
+            <p:cNvPicPr>
+              <a:picLocks noChangeAspect="1"/>
+            </p:cNvPicPr>
+            <p:nvPr/>
+          </p:nvPicPr>
+          <p:blipFill>
+            <a:blip r:embed="rId4"/>
+            <a:stretch>
+              <a:fillRect/>
+            </a:stretch>
+          </p:blipFill>
+          <p:spPr>
+            <a:xfrm>
+              <a:off x="4676143" y="3768071"/>
+              <a:ext cx="5400040" cy="2561590"/>
+            </a:xfrm>
+            <a:prstGeom prst="rect">
+              <a:avLst/>
+            </a:prstGeom>
+          </p:spPr>
+        </p:pic>
+      </p:grpSp>
     </p:spTree>
     <p:extLst>
       <p:ext uri="{BB962C8B-B14F-4D97-AF65-F5344CB8AC3E}">
         <p14:creationId xmlns:p14="http://schemas.microsoft.com/office/powerpoint/2010/main" val="945956433"/>
+      </p:ext>
+    </p:extLst>
+  </p:cSld>
+  <p:clrMapOvr>
+    <a:masterClrMapping/>
+  </p:clrMapOvr>
+</p:sld>
+</file>
+
+<file path=ppt/slides/slide2.xml><?xml version="1.0" encoding="utf-8"?>
+<p:sld xmlns:a="http://schemas.openxmlformats.org/drawingml/2006/main" xmlns:r="http://schemas.openxmlformats.org/officeDocument/2006/relationships" xmlns:p="http://schemas.openxmlformats.org/presentationml/2006/main">
+  <p:cSld>
+    <p:spTree>
+      <p:nvGrpSpPr>
+        <p:cNvPr id="1" name=""/>
+        <p:cNvGrpSpPr/>
+        <p:nvPr/>
+      </p:nvGrpSpPr>
+      <p:grpSpPr>
+        <a:xfrm>
+          <a:off x="0" y="0"/>
+          <a:ext cx="0" cy="0"/>
+          <a:chOff x="0" y="0"/>
+          <a:chExt cx="0" cy="0"/>
+        </a:xfrm>
+      </p:grpSpPr>
+      <p:sp>
+        <p:nvSpPr>
+          <p:cNvPr id="4" name="正方形/長方形 3">
+            <a:extLst>
+              <a:ext uri="{FF2B5EF4-FFF2-40B4-BE49-F238E27FC236}">
+                <a16:creationId xmlns:a16="http://schemas.microsoft.com/office/drawing/2014/main" id="{B8054A56-5739-A247-8620-86178DCDBD58}"/>
+              </a:ext>
+            </a:extLst>
+          </p:cNvPr>
+          <p:cNvSpPr/>
+          <p:nvPr/>
+        </p:nvSpPr>
+        <p:spPr>
+          <a:xfrm>
+            <a:off x="0" y="0"/>
+            <a:ext cx="12192000" cy="6858000"/>
+          </a:xfrm>
+          <a:prstGeom prst="rect">
+            <a:avLst/>
+          </a:prstGeom>
+          <a:solidFill>
+            <a:schemeClr val="bg1"/>
+          </a:solidFill>
+          <a:ln>
+            <a:noFill/>
+          </a:ln>
+        </p:spPr>
+        <p:style>
+          <a:lnRef idx="2">
+            <a:schemeClr val="accent1">
+              <a:shade val="50000"/>
+            </a:schemeClr>
+          </a:lnRef>
+          <a:fillRef idx="1">
+            <a:schemeClr val="accent1"/>
+          </a:fillRef>
+          <a:effectRef idx="0">
+            <a:schemeClr val="accent1"/>
+          </a:effectRef>
+          <a:fontRef idx="minor">
+            <a:schemeClr val="lt1"/>
+          </a:fontRef>
+        </p:style>
+        <p:txBody>
+          <a:bodyPr rtlCol="0" anchor="ctr"/>
+          <a:lstStyle/>
+          <a:p>
+            <a:pPr algn="ctr"/>
+            <a:endParaRPr kumimoji="1" lang="ja-JP" altLang="en-US"/>
+          </a:p>
+        </p:txBody>
+      </p:sp>
+      <p:pic>
+        <p:nvPicPr>
+          <p:cNvPr id="6" name="図 5">
+            <a:extLst>
+              <a:ext uri="{FF2B5EF4-FFF2-40B4-BE49-F238E27FC236}">
+                <a16:creationId xmlns:a16="http://schemas.microsoft.com/office/drawing/2014/main" id="{9F324E30-224B-9A42-A9F0-F0D4B90FC997}"/>
+              </a:ext>
+            </a:extLst>
+          </p:cNvPr>
+          <p:cNvPicPr>
+            <a:picLocks noChangeAspect="1"/>
+          </p:cNvPicPr>
+          <p:nvPr/>
+        </p:nvPicPr>
+        <p:blipFill rotWithShape="1">
+          <a:blip r:embed="rId2">
+            <a:extLst>
+              <a:ext uri="{28A0092B-C50C-407E-A947-70E740481C1C}">
+                <a14:useLocalDpi xmlns:a14="http://schemas.microsoft.com/office/drawing/2010/main" val="0"/>
+              </a:ext>
+            </a:extLst>
+          </a:blip>
+          <a:srcRect l="4807"/>
+          <a:stretch/>
+        </p:blipFill>
+        <p:spPr>
+          <a:xfrm>
+            <a:off x="0" y="1407181"/>
+            <a:ext cx="3866221" cy="2955786"/>
+          </a:xfrm>
+          <a:prstGeom prst="rect">
+            <a:avLst/>
+          </a:prstGeom>
+        </p:spPr>
+      </p:pic>
+      <p:sp>
+        <p:nvSpPr>
+          <p:cNvPr id="7" name="テキスト ボックス 6">
+            <a:extLst>
+              <a:ext uri="{FF2B5EF4-FFF2-40B4-BE49-F238E27FC236}">
+                <a16:creationId xmlns:a16="http://schemas.microsoft.com/office/drawing/2014/main" id="{CFA43A45-0222-F444-ACD7-CD4A19A647BA}"/>
+              </a:ext>
+            </a:extLst>
+          </p:cNvPr>
+          <p:cNvSpPr txBox="1"/>
+          <p:nvPr/>
+        </p:nvSpPr>
+        <p:spPr>
+          <a:xfrm>
+            <a:off x="858073" y="1091567"/>
+            <a:ext cx="2665153" cy="461665"/>
+          </a:xfrm>
+          <a:prstGeom prst="rect">
+            <a:avLst/>
+          </a:prstGeom>
+          <a:noFill/>
+          <a:ln>
+            <a:solidFill>
+              <a:schemeClr val="tx1"/>
+            </a:solidFill>
+          </a:ln>
+        </p:spPr>
+        <p:txBody>
+          <a:bodyPr wrap="none" rtlCol="0">
+            <a:spAutoFit/>
+          </a:bodyPr>
+          <a:lstStyle/>
+          <a:p>
+            <a:r>
+              <a:rPr lang="en-US" altLang="ja-JP" sz="2400" dirty="0">
+                <a:latin typeface="Arial" panose="020B0604020202020204" pitchFamily="34" charset="0"/>
+                <a:cs typeface="Arial" panose="020B0604020202020204" pitchFamily="34" charset="0"/>
+              </a:rPr>
+              <a:t>U</a:t>
+            </a:r>
+            <a:r>
+              <a:rPr lang="en-US" altLang="ja-JP" sz="2400" baseline="-25000" dirty="0">
+                <a:latin typeface="Arial" panose="020B0604020202020204" pitchFamily="34" charset="0"/>
+                <a:cs typeface="Arial" panose="020B0604020202020204" pitchFamily="34" charset="0"/>
+              </a:rPr>
+              <a:t>Λα</a:t>
+            </a:r>
+            <a:r>
+              <a:rPr lang="en-US" altLang="ja-JP" sz="2400" dirty="0">
+                <a:latin typeface="Arial" panose="020B0604020202020204" pitchFamily="34" charset="0"/>
+                <a:cs typeface="Arial" panose="020B0604020202020204" pitchFamily="34" charset="0"/>
+              </a:rPr>
+              <a:t>: (</a:t>
+            </a:r>
+            <a:r>
+              <a:rPr lang="en-US" altLang="ja-JP" sz="2400" dirty="0" err="1">
+                <a:latin typeface="Arial" panose="020B0604020202020204" pitchFamily="34" charset="0"/>
+                <a:cs typeface="Arial" panose="020B0604020202020204" pitchFamily="34" charset="0"/>
+              </a:rPr>
+              <a:t>Λ</a:t>
+            </a:r>
+            <a:r>
+              <a:rPr lang="en-US" altLang="ja-JP" sz="2400" dirty="0">
+                <a:latin typeface="Arial" panose="020B0604020202020204" pitchFamily="34" charset="0"/>
+                <a:cs typeface="Arial" panose="020B0604020202020204" pitchFamily="34" charset="0"/>
+              </a:rPr>
+              <a:t>α</a:t>
+            </a:r>
+            <a:r>
+              <a:rPr lang="ja-JP" altLang="en-US" sz="2400" dirty="0">
+                <a:latin typeface="Arial" panose="020B0604020202020204" pitchFamily="34" charset="0"/>
+                <a:cs typeface="Arial" panose="020B0604020202020204" pitchFamily="34" charset="0"/>
+              </a:rPr>
+              <a:t> </a:t>
+            </a:r>
+            <a:r>
+              <a:rPr lang="en-US" altLang="ja-JP" sz="2400" dirty="0">
+                <a:latin typeface="Arial" panose="020B0604020202020204" pitchFamily="34" charset="0"/>
+                <a:cs typeface="Arial" panose="020B0604020202020204" pitchFamily="34" charset="0"/>
+              </a:rPr>
+              <a:t>potential)</a:t>
+            </a:r>
+            <a:endParaRPr kumimoji="1" lang="ja-JP" altLang="en-US" sz="2400" dirty="0">
+              <a:latin typeface="Arial" panose="020B0604020202020204" pitchFamily="34" charset="0"/>
+              <a:cs typeface="Arial" panose="020B0604020202020204" pitchFamily="34" charset="0"/>
+            </a:endParaRPr>
+          </a:p>
+        </p:txBody>
+      </p:sp>
+      <p:sp>
+        <p:nvSpPr>
+          <p:cNvPr id="3" name="テキスト ボックス 2">
+            <a:extLst>
+              <a:ext uri="{FF2B5EF4-FFF2-40B4-BE49-F238E27FC236}">
+                <a16:creationId xmlns:a16="http://schemas.microsoft.com/office/drawing/2014/main" id="{A62AC495-3EDC-FF4A-8507-71FBA3947527}"/>
+              </a:ext>
+            </a:extLst>
+          </p:cNvPr>
+          <p:cNvSpPr txBox="1"/>
+          <p:nvPr/>
+        </p:nvSpPr>
+        <p:spPr>
+          <a:xfrm rot="20191267">
+            <a:off x="718394" y="3161491"/>
+            <a:ext cx="2869183" cy="461665"/>
+          </a:xfrm>
+          <a:prstGeom prst="rect">
+            <a:avLst/>
+          </a:prstGeom>
+          <a:noFill/>
+        </p:spPr>
+        <p:txBody>
+          <a:bodyPr wrap="none" rtlCol="0">
+            <a:spAutoFit/>
+          </a:bodyPr>
+          <a:lstStyle/>
+          <a:p>
+            <a:r>
+              <a:rPr kumimoji="1" lang="en-US" altLang="ja-JP" sz="2400" b="1" i="1" dirty="0">
+                <a:solidFill>
+                  <a:srgbClr val="FF0000"/>
+                </a:solidFill>
+              </a:rPr>
+              <a:t>Constraint by </a:t>
+            </a:r>
+            <a:r>
+              <a:rPr kumimoji="1" lang="en-US" altLang="ja-JP" sz="2400" b="1" baseline="30000" dirty="0">
+                <a:solidFill>
+                  <a:srgbClr val="FF0000"/>
+                </a:solidFill>
+              </a:rPr>
+              <a:t>5</a:t>
+            </a:r>
+            <a:r>
+              <a:rPr kumimoji="1" lang="en-US" altLang="ja-JP" sz="2400" b="1" baseline="-25000" dirty="0">
+                <a:solidFill>
+                  <a:srgbClr val="FF0000"/>
+                </a:solidFill>
+              </a:rPr>
+              <a:t>Λ</a:t>
+            </a:r>
+            <a:r>
+              <a:rPr kumimoji="1" lang="en-US" altLang="ja-JP" sz="2400" b="1" dirty="0">
+                <a:solidFill>
+                  <a:srgbClr val="FF0000"/>
+                </a:solidFill>
+              </a:rPr>
+              <a:t>He</a:t>
+            </a:r>
+            <a:endParaRPr kumimoji="1" lang="ja-JP" altLang="en-US" sz="2400" b="1">
+              <a:solidFill>
+                <a:srgbClr val="FF0000"/>
+              </a:solidFill>
+            </a:endParaRPr>
+          </a:p>
+        </p:txBody>
+      </p:sp>
+      <p:grpSp>
+        <p:nvGrpSpPr>
+          <p:cNvPr id="11" name="グループ化 10">
+            <a:extLst>
+              <a:ext uri="{FF2B5EF4-FFF2-40B4-BE49-F238E27FC236}">
+                <a16:creationId xmlns:a16="http://schemas.microsoft.com/office/drawing/2014/main" id="{BDF28368-8837-224E-BB7E-54F8CD957157}"/>
+              </a:ext>
+            </a:extLst>
+          </p:cNvPr>
+          <p:cNvGrpSpPr/>
+          <p:nvPr/>
+        </p:nvGrpSpPr>
+        <p:grpSpPr>
+          <a:xfrm>
+            <a:off x="189565" y="4101715"/>
+            <a:ext cx="3866221" cy="2449902"/>
+            <a:chOff x="450825" y="4304911"/>
+            <a:chExt cx="3247505" cy="1974141"/>
+          </a:xfrm>
+        </p:grpSpPr>
+        <p:pic>
+          <p:nvPicPr>
+            <p:cNvPr id="8" name="図 7">
+              <a:extLst>
+                <a:ext uri="{FF2B5EF4-FFF2-40B4-BE49-F238E27FC236}">
+                  <a16:creationId xmlns:a16="http://schemas.microsoft.com/office/drawing/2014/main" id="{1EA2C1DE-B05E-EE44-8267-3FAC2C015A36}"/>
+                </a:ext>
+              </a:extLst>
+            </p:cNvPr>
+            <p:cNvPicPr/>
+            <p:nvPr/>
+          </p:nvPicPr>
+          <p:blipFill rotWithShape="1">
+            <a:blip r:embed="rId3">
+              <a:extLst>
+                <a:ext uri="{28A0092B-C50C-407E-A947-70E740481C1C}">
+                  <a14:useLocalDpi xmlns:a14="http://schemas.microsoft.com/office/drawing/2010/main" val="0"/>
+                </a:ext>
+              </a:extLst>
+            </a:blip>
+            <a:srcRect l="3607" t="52020" r="75437" b="14311"/>
+            <a:stretch/>
+          </p:blipFill>
+          <p:spPr bwMode="auto">
+            <a:xfrm>
+              <a:off x="618111" y="4475879"/>
+              <a:ext cx="2905115" cy="1803173"/>
+            </a:xfrm>
+            <a:prstGeom prst="rect">
+              <a:avLst/>
+            </a:prstGeom>
+            <a:noFill/>
+            <a:ln>
+              <a:noFill/>
+            </a:ln>
+          </p:spPr>
+        </p:pic>
+        <p:sp>
+          <p:nvSpPr>
+            <p:cNvPr id="9" name="正方形/長方形 8">
+              <a:extLst>
+                <a:ext uri="{FF2B5EF4-FFF2-40B4-BE49-F238E27FC236}">
+                  <a16:creationId xmlns:a16="http://schemas.microsoft.com/office/drawing/2014/main" id="{BDCA9CEB-22DF-CE4A-B4F3-D0EF36F2DCD8}"/>
+                </a:ext>
+              </a:extLst>
+            </p:cNvPr>
+            <p:cNvSpPr/>
+            <p:nvPr/>
+          </p:nvSpPr>
+          <p:spPr>
+            <a:xfrm>
+              <a:off x="450825" y="4304911"/>
+              <a:ext cx="1334431" cy="412480"/>
+            </a:xfrm>
+            <a:prstGeom prst="rect">
+              <a:avLst/>
+            </a:prstGeom>
+            <a:solidFill>
+              <a:schemeClr val="bg1"/>
+            </a:solidFill>
+            <a:ln>
+              <a:solidFill>
+                <a:schemeClr val="bg1"/>
+              </a:solidFill>
+            </a:ln>
+          </p:spPr>
+          <p:style>
+            <a:lnRef idx="2">
+              <a:schemeClr val="accent1">
+                <a:shade val="50000"/>
+              </a:schemeClr>
+            </a:lnRef>
+            <a:fillRef idx="1">
+              <a:schemeClr val="accent1"/>
+            </a:fillRef>
+            <a:effectRef idx="0">
+              <a:schemeClr val="accent1"/>
+            </a:effectRef>
+            <a:fontRef idx="minor">
+              <a:schemeClr val="lt1"/>
+            </a:fontRef>
+          </p:style>
+          <p:txBody>
+            <a:bodyPr rtlCol="0" anchor="ctr"/>
+            <a:lstStyle/>
+            <a:p>
+              <a:pPr algn="ctr"/>
+              <a:endParaRPr kumimoji="1" lang="ja-JP" altLang="en-US"/>
+            </a:p>
+          </p:txBody>
+        </p:sp>
+        <p:sp>
+          <p:nvSpPr>
+            <p:cNvPr id="10" name="正方形/長方形 9">
+              <a:extLst>
+                <a:ext uri="{FF2B5EF4-FFF2-40B4-BE49-F238E27FC236}">
+                  <a16:creationId xmlns:a16="http://schemas.microsoft.com/office/drawing/2014/main" id="{6DD79810-D26C-4645-9E6C-40CF1C49E547}"/>
+                </a:ext>
+              </a:extLst>
+            </p:cNvPr>
+            <p:cNvSpPr/>
+            <p:nvPr/>
+          </p:nvSpPr>
+          <p:spPr>
+            <a:xfrm rot="1004328">
+              <a:off x="2176732" y="4498892"/>
+              <a:ext cx="1521598" cy="412480"/>
+            </a:xfrm>
+            <a:prstGeom prst="rect">
+              <a:avLst/>
+            </a:prstGeom>
+            <a:solidFill>
+              <a:schemeClr val="bg1"/>
+            </a:solidFill>
+            <a:ln>
+              <a:solidFill>
+                <a:schemeClr val="bg1"/>
+              </a:solidFill>
+            </a:ln>
+          </p:spPr>
+          <p:style>
+            <a:lnRef idx="2">
+              <a:schemeClr val="accent1">
+                <a:shade val="50000"/>
+              </a:schemeClr>
+            </a:lnRef>
+            <a:fillRef idx="1">
+              <a:schemeClr val="accent1"/>
+            </a:fillRef>
+            <a:effectRef idx="0">
+              <a:schemeClr val="accent1"/>
+            </a:effectRef>
+            <a:fontRef idx="minor">
+              <a:schemeClr val="lt1"/>
+            </a:fontRef>
+          </p:style>
+          <p:txBody>
+            <a:bodyPr rtlCol="0" anchor="ctr"/>
+            <a:lstStyle/>
+            <a:p>
+              <a:pPr algn="ctr"/>
+              <a:endParaRPr kumimoji="1" lang="ja-JP" altLang="en-US"/>
+            </a:p>
+          </p:txBody>
+        </p:sp>
+      </p:grpSp>
+      <p:pic>
+        <p:nvPicPr>
+          <p:cNvPr id="17" name="図 16">
+            <a:extLst>
+              <a:ext uri="{FF2B5EF4-FFF2-40B4-BE49-F238E27FC236}">
+                <a16:creationId xmlns:a16="http://schemas.microsoft.com/office/drawing/2014/main" id="{4CC56A4C-6B0E-BD45-B55C-01CE692CBEF6}"/>
+              </a:ext>
+            </a:extLst>
+          </p:cNvPr>
+          <p:cNvPicPr>
+            <a:picLocks noChangeAspect="1"/>
+          </p:cNvPicPr>
+          <p:nvPr/>
+        </p:nvPicPr>
+        <p:blipFill rotWithShape="1">
+          <a:blip r:embed="rId4">
+            <a:extLst>
+              <a:ext uri="{28A0092B-C50C-407E-A947-70E740481C1C}">
+                <a14:useLocalDpi xmlns:a14="http://schemas.microsoft.com/office/drawing/2010/main" val="0"/>
+              </a:ext>
+            </a:extLst>
+          </a:blip>
+          <a:srcRect r="67814"/>
+          <a:stretch/>
+        </p:blipFill>
+        <p:spPr>
+          <a:xfrm>
+            <a:off x="4978399" y="1027487"/>
+            <a:ext cx="3734122" cy="2934313"/>
+          </a:xfrm>
+          <a:prstGeom prst="rect">
+            <a:avLst/>
+          </a:prstGeom>
+        </p:spPr>
+      </p:pic>
+      <p:cxnSp>
+        <p:nvCxnSpPr>
+          <p:cNvPr id="13" name="直線矢印コネクタ 12">
+            <a:extLst>
+              <a:ext uri="{FF2B5EF4-FFF2-40B4-BE49-F238E27FC236}">
+                <a16:creationId xmlns:a16="http://schemas.microsoft.com/office/drawing/2014/main" id="{46FA9399-C70B-0043-9BC0-7C72E7262263}"/>
+              </a:ext>
+            </a:extLst>
+          </p:cNvPr>
+          <p:cNvCxnSpPr>
+            <a:stCxn id="8" idx="0"/>
+          </p:cNvCxnSpPr>
+          <p:nvPr/>
+        </p:nvCxnSpPr>
+        <p:spPr>
+          <a:xfrm flipV="1">
+            <a:off x="2118022" y="3106057"/>
+            <a:ext cx="3034549" cy="1207829"/>
+          </a:xfrm>
+          <a:prstGeom prst="straightConnector1">
+            <a:avLst/>
+          </a:prstGeom>
+          <a:ln>
+            <a:tailEnd type="triangle"/>
+          </a:ln>
+        </p:spPr>
+        <p:style>
+          <a:lnRef idx="1">
+            <a:schemeClr val="accent1"/>
+          </a:lnRef>
+          <a:fillRef idx="0">
+            <a:schemeClr val="accent1"/>
+          </a:fillRef>
+          <a:effectRef idx="0">
+            <a:schemeClr val="accent1"/>
+          </a:effectRef>
+          <a:fontRef idx="minor">
+            <a:schemeClr val="tx1"/>
+          </a:fontRef>
+        </p:style>
+      </p:cxnSp>
+      <p:sp>
+        <p:nvSpPr>
+          <p:cNvPr id="18" name="テキスト ボックス 17">
+            <a:extLst>
+              <a:ext uri="{FF2B5EF4-FFF2-40B4-BE49-F238E27FC236}">
+                <a16:creationId xmlns:a16="http://schemas.microsoft.com/office/drawing/2014/main" id="{AF02F657-2F2A-264B-9E8D-77A498D8D6D9}"/>
+              </a:ext>
+            </a:extLst>
+          </p:cNvPr>
+          <p:cNvSpPr txBox="1"/>
+          <p:nvPr/>
+        </p:nvSpPr>
+        <p:spPr>
+          <a:xfrm>
+            <a:off x="5817172" y="849569"/>
+            <a:ext cx="2388795" cy="461665"/>
+          </a:xfrm>
+          <a:prstGeom prst="rect">
+            <a:avLst/>
+          </a:prstGeom>
+          <a:solidFill>
+            <a:schemeClr val="bg1"/>
+          </a:solidFill>
+          <a:ln>
+            <a:solidFill>
+              <a:schemeClr val="tx1"/>
+            </a:solidFill>
+          </a:ln>
+        </p:spPr>
+        <p:txBody>
+          <a:bodyPr wrap="none" rtlCol="0">
+            <a:spAutoFit/>
+          </a:bodyPr>
+          <a:lstStyle/>
+          <a:p>
+            <a:r>
+              <a:rPr lang="en-US" altLang="ja-JP" sz="2400" b="1" dirty="0">
+                <a:latin typeface="Arial" panose="020B0604020202020204" pitchFamily="34" charset="0"/>
+                <a:cs typeface="Arial" panose="020B0604020202020204" pitchFamily="34" charset="0"/>
+              </a:rPr>
+              <a:t>C</a:t>
+            </a:r>
+            <a:r>
+              <a:rPr lang="en-US" altLang="ja-JP" sz="2400" b="1" baseline="-25000" dirty="0">
+                <a:latin typeface="Arial" panose="020B0604020202020204" pitchFamily="34" charset="0"/>
+                <a:cs typeface="Arial" panose="020B0604020202020204" pitchFamily="34" charset="0"/>
+              </a:rPr>
+              <a:t>Λα</a:t>
+            </a:r>
+            <a:r>
+              <a:rPr lang="ja-JP" altLang="en-US" sz="2400" b="1">
+                <a:latin typeface="Arial" panose="020B0604020202020204" pitchFamily="34" charset="0"/>
+                <a:cs typeface="Arial" panose="020B0604020202020204" pitchFamily="34" charset="0"/>
+              </a:rPr>
+              <a:t>　</a:t>
+            </a:r>
+            <a:r>
+              <a:rPr lang="en-US" altLang="ja-JP" sz="2400" b="1" dirty="0">
+                <a:latin typeface="Arial" panose="020B0604020202020204" pitchFamily="34" charset="0"/>
+                <a:cs typeface="Arial" panose="020B0604020202020204" pitchFamily="34" charset="0"/>
+              </a:rPr>
+              <a:t>(R = 1 </a:t>
+            </a:r>
+            <a:r>
+              <a:rPr lang="en-US" altLang="ja-JP" sz="2400" b="1" dirty="0" err="1">
+                <a:latin typeface="Arial" panose="020B0604020202020204" pitchFamily="34" charset="0"/>
+                <a:cs typeface="Arial" panose="020B0604020202020204" pitchFamily="34" charset="0"/>
+              </a:rPr>
+              <a:t>fm</a:t>
+            </a:r>
+            <a:r>
+              <a:rPr lang="en-US" altLang="ja-JP" sz="2400" b="1" dirty="0">
+                <a:latin typeface="Arial" panose="020B0604020202020204" pitchFamily="34" charset="0"/>
+                <a:cs typeface="Arial" panose="020B0604020202020204" pitchFamily="34" charset="0"/>
+              </a:rPr>
+              <a:t>)</a:t>
+            </a:r>
+            <a:endParaRPr kumimoji="1" lang="ja-JP" altLang="en-US" sz="2400" b="1">
+              <a:latin typeface="Arial" panose="020B0604020202020204" pitchFamily="34" charset="0"/>
+              <a:cs typeface="Arial" panose="020B0604020202020204" pitchFamily="34" charset="0"/>
+            </a:endParaRPr>
+          </a:p>
+        </p:txBody>
+      </p:sp>
+      <p:pic>
+        <p:nvPicPr>
+          <p:cNvPr id="19" name="図 18">
+            <a:extLst>
+              <a:ext uri="{FF2B5EF4-FFF2-40B4-BE49-F238E27FC236}">
+                <a16:creationId xmlns:a16="http://schemas.microsoft.com/office/drawing/2014/main" id="{A0D10FC0-58B2-294B-8503-BF9573522EE9}"/>
+              </a:ext>
+            </a:extLst>
+          </p:cNvPr>
+          <p:cNvPicPr>
+            <a:picLocks noChangeAspect="1"/>
+          </p:cNvPicPr>
+          <p:nvPr/>
+        </p:nvPicPr>
+        <p:blipFill rotWithShape="1">
+          <a:blip r:embed="rId4">
+            <a:extLst>
+              <a:ext uri="{28A0092B-C50C-407E-A947-70E740481C1C}">
+                <a14:useLocalDpi xmlns:a14="http://schemas.microsoft.com/office/drawing/2010/main" val="0"/>
+              </a:ext>
+            </a:extLst>
+          </a:blip>
+          <a:srcRect l="33394" r="33700" b="3765"/>
+          <a:stretch/>
+        </p:blipFill>
+        <p:spPr>
+          <a:xfrm>
+            <a:off x="4960620" y="4052680"/>
+            <a:ext cx="3817619" cy="2823826"/>
+          </a:xfrm>
+          <a:prstGeom prst="rect">
+            <a:avLst/>
+          </a:prstGeom>
+        </p:spPr>
+      </p:pic>
+      <p:sp>
+        <p:nvSpPr>
+          <p:cNvPr id="20" name="テキスト ボックス 19">
+            <a:extLst>
+              <a:ext uri="{FF2B5EF4-FFF2-40B4-BE49-F238E27FC236}">
+                <a16:creationId xmlns:a16="http://schemas.microsoft.com/office/drawing/2014/main" id="{82F50C3F-97A2-9547-B458-57B5FABB85C7}"/>
+              </a:ext>
+            </a:extLst>
+          </p:cNvPr>
+          <p:cNvSpPr txBox="1"/>
+          <p:nvPr/>
+        </p:nvSpPr>
+        <p:spPr>
+          <a:xfrm>
+            <a:off x="5755202" y="3895993"/>
+            <a:ext cx="2420406" cy="461665"/>
+          </a:xfrm>
+          <a:prstGeom prst="rect">
+            <a:avLst/>
+          </a:prstGeom>
+          <a:solidFill>
+            <a:schemeClr val="bg1"/>
+          </a:solidFill>
+          <a:ln>
+            <a:solidFill>
+              <a:schemeClr val="tx1"/>
+            </a:solidFill>
+          </a:ln>
+        </p:spPr>
+        <p:txBody>
+          <a:bodyPr wrap="none" rtlCol="0">
+            <a:spAutoFit/>
+          </a:bodyPr>
+          <a:lstStyle/>
+          <a:p>
+            <a:r>
+              <a:rPr lang="en-US" altLang="ja-JP" sz="2400" b="1" dirty="0">
+                <a:latin typeface="Arial" panose="020B0604020202020204" pitchFamily="34" charset="0"/>
+                <a:cs typeface="Arial" panose="020B0604020202020204" pitchFamily="34" charset="0"/>
+              </a:rPr>
+              <a:t>C</a:t>
+            </a:r>
+            <a:r>
+              <a:rPr lang="en-US" altLang="ja-JP" sz="2400" b="1" baseline="-25000" dirty="0">
+                <a:latin typeface="Arial" panose="020B0604020202020204" pitchFamily="34" charset="0"/>
+                <a:cs typeface="Arial" panose="020B0604020202020204" pitchFamily="34" charset="0"/>
+              </a:rPr>
+              <a:t>Λα</a:t>
+            </a:r>
+            <a:r>
+              <a:rPr lang="ja-JP" altLang="en-US" sz="2400" b="1">
+                <a:latin typeface="Arial" panose="020B0604020202020204" pitchFamily="34" charset="0"/>
+                <a:cs typeface="Arial" panose="020B0604020202020204" pitchFamily="34" charset="0"/>
+              </a:rPr>
+              <a:t>　</a:t>
+            </a:r>
+            <a:r>
+              <a:rPr lang="en-US" altLang="ja-JP" sz="2400" b="1" dirty="0">
+                <a:latin typeface="Arial" panose="020B0604020202020204" pitchFamily="34" charset="0"/>
+                <a:cs typeface="Arial" panose="020B0604020202020204" pitchFamily="34" charset="0"/>
+              </a:rPr>
+              <a:t>(R = 3 </a:t>
+            </a:r>
+            <a:r>
+              <a:rPr lang="en-US" altLang="ja-JP" sz="2400" b="1" dirty="0" err="1">
+                <a:latin typeface="Arial" panose="020B0604020202020204" pitchFamily="34" charset="0"/>
+                <a:cs typeface="Arial" panose="020B0604020202020204" pitchFamily="34" charset="0"/>
+              </a:rPr>
+              <a:t>fm</a:t>
+            </a:r>
+            <a:r>
+              <a:rPr lang="en-US" altLang="ja-JP" sz="2400" b="1" dirty="0">
+                <a:latin typeface="Arial" panose="020B0604020202020204" pitchFamily="34" charset="0"/>
+                <a:cs typeface="Arial" panose="020B0604020202020204" pitchFamily="34" charset="0"/>
+              </a:rPr>
+              <a:t>)</a:t>
+            </a:r>
+            <a:endParaRPr kumimoji="1" lang="ja-JP" altLang="en-US" sz="2400" b="1">
+              <a:latin typeface="Arial" panose="020B0604020202020204" pitchFamily="34" charset="0"/>
+              <a:cs typeface="Arial" panose="020B0604020202020204" pitchFamily="34" charset="0"/>
+            </a:endParaRPr>
+          </a:p>
+        </p:txBody>
+      </p:sp>
+      <p:cxnSp>
+        <p:nvCxnSpPr>
+          <p:cNvPr id="15" name="直線矢印コネクタ 14">
+            <a:extLst>
+              <a:ext uri="{FF2B5EF4-FFF2-40B4-BE49-F238E27FC236}">
+                <a16:creationId xmlns:a16="http://schemas.microsoft.com/office/drawing/2014/main" id="{8FE03F0C-7633-4648-956B-5EF3A751832B}"/>
+              </a:ext>
+            </a:extLst>
+          </p:cNvPr>
+          <p:cNvCxnSpPr>
+            <a:cxnSpLocks/>
+          </p:cNvCxnSpPr>
+          <p:nvPr/>
+        </p:nvCxnSpPr>
+        <p:spPr>
+          <a:xfrm>
+            <a:off x="2152985" y="4338427"/>
+            <a:ext cx="2999586" cy="765923"/>
+          </a:xfrm>
+          <a:prstGeom prst="straightConnector1">
+            <a:avLst/>
+          </a:prstGeom>
+          <a:ln>
+            <a:tailEnd type="triangle"/>
+          </a:ln>
+        </p:spPr>
+        <p:style>
+          <a:lnRef idx="1">
+            <a:schemeClr val="accent1"/>
+          </a:lnRef>
+          <a:fillRef idx="0">
+            <a:schemeClr val="accent1"/>
+          </a:fillRef>
+          <a:effectRef idx="0">
+            <a:schemeClr val="accent1"/>
+          </a:effectRef>
+          <a:fontRef idx="minor">
+            <a:schemeClr val="tx1"/>
+          </a:fontRef>
+        </p:style>
+      </p:cxnSp>
+      <p:sp>
+        <p:nvSpPr>
+          <p:cNvPr id="21" name="テキスト ボックス 20">
+            <a:extLst>
+              <a:ext uri="{FF2B5EF4-FFF2-40B4-BE49-F238E27FC236}">
+                <a16:creationId xmlns:a16="http://schemas.microsoft.com/office/drawing/2014/main" id="{CE96D769-E4D0-7E4F-8D71-CCBD83D5955B}"/>
+              </a:ext>
+            </a:extLst>
+          </p:cNvPr>
+          <p:cNvSpPr txBox="1"/>
+          <p:nvPr/>
+        </p:nvSpPr>
+        <p:spPr>
+          <a:xfrm rot="20228707">
+            <a:off x="2911067" y="3472407"/>
+            <a:ext cx="2439707" cy="523220"/>
+          </a:xfrm>
+          <a:prstGeom prst="rect">
+            <a:avLst/>
+          </a:prstGeom>
+          <a:noFill/>
+        </p:spPr>
+        <p:txBody>
+          <a:bodyPr wrap="none" rtlCol="0">
+            <a:spAutoFit/>
+          </a:bodyPr>
+          <a:lstStyle/>
+          <a:p>
+            <a:r>
+              <a:rPr kumimoji="1" lang="en-US" altLang="ja-JP" sz="2800" b="1" dirty="0"/>
+              <a:t>Small source</a:t>
+            </a:r>
+            <a:endParaRPr kumimoji="1" lang="ja-JP" altLang="en-US" sz="2800" b="1"/>
+          </a:p>
+        </p:txBody>
+      </p:sp>
+      <p:sp>
+        <p:nvSpPr>
+          <p:cNvPr id="22" name="テキスト ボックス 21">
+            <a:extLst>
+              <a:ext uri="{FF2B5EF4-FFF2-40B4-BE49-F238E27FC236}">
+                <a16:creationId xmlns:a16="http://schemas.microsoft.com/office/drawing/2014/main" id="{696A5E2E-3DD8-1047-B597-78B26605C2F9}"/>
+              </a:ext>
+            </a:extLst>
+          </p:cNvPr>
+          <p:cNvSpPr txBox="1"/>
+          <p:nvPr/>
+        </p:nvSpPr>
+        <p:spPr>
+          <a:xfrm rot="863723">
+            <a:off x="2667163" y="4743935"/>
+            <a:ext cx="2472600" cy="523220"/>
+          </a:xfrm>
+          <a:prstGeom prst="rect">
+            <a:avLst/>
+          </a:prstGeom>
+          <a:noFill/>
+        </p:spPr>
+        <p:txBody>
+          <a:bodyPr wrap="none" rtlCol="0">
+            <a:spAutoFit/>
+          </a:bodyPr>
+          <a:lstStyle/>
+          <a:p>
+            <a:r>
+              <a:rPr lang="en-US" altLang="ja-JP" sz="2800" b="1" dirty="0"/>
+              <a:t>Large</a:t>
+            </a:r>
+            <a:r>
+              <a:rPr kumimoji="1" lang="en-US" altLang="ja-JP" sz="2800" b="1" dirty="0"/>
+              <a:t> source</a:t>
+            </a:r>
+            <a:endParaRPr kumimoji="1" lang="ja-JP" altLang="en-US" sz="2800" b="1"/>
+          </a:p>
+        </p:txBody>
+      </p:sp>
+      <p:sp>
+        <p:nvSpPr>
+          <p:cNvPr id="24" name="テキスト ボックス 23">
+            <a:extLst>
+              <a:ext uri="{FF2B5EF4-FFF2-40B4-BE49-F238E27FC236}">
+                <a16:creationId xmlns:a16="http://schemas.microsoft.com/office/drawing/2014/main" id="{6EB9A2EA-E9D0-F94B-8BCA-19578053E397}"/>
+              </a:ext>
+            </a:extLst>
+          </p:cNvPr>
+          <p:cNvSpPr txBox="1"/>
+          <p:nvPr/>
+        </p:nvSpPr>
+        <p:spPr>
+          <a:xfrm rot="20332948">
+            <a:off x="5412214" y="2556567"/>
+            <a:ext cx="2465482" cy="707886"/>
+          </a:xfrm>
+          <a:prstGeom prst="rect">
+            <a:avLst/>
+          </a:prstGeom>
+          <a:noFill/>
+        </p:spPr>
+        <p:txBody>
+          <a:bodyPr wrap="none" rtlCol="0">
+            <a:spAutoFit/>
+          </a:bodyPr>
+          <a:lstStyle/>
+          <a:p>
+            <a:pPr algn="ctr"/>
+            <a:r>
+              <a:rPr kumimoji="1" lang="en-US" altLang="ja-JP" sz="2000" b="1" dirty="0">
+                <a:solidFill>
+                  <a:srgbClr val="FF0000"/>
+                </a:solidFill>
+              </a:rPr>
+              <a:t>Large difference !!</a:t>
+            </a:r>
+          </a:p>
+          <a:p>
+            <a:pPr algn="ctr"/>
+            <a:r>
+              <a:rPr lang="en-US" altLang="ja-JP" sz="2000" b="1" dirty="0">
+                <a:solidFill>
+                  <a:srgbClr val="FF0000"/>
+                </a:solidFill>
+              </a:rPr>
+              <a:t>(</a:t>
+            </a:r>
+            <a:r>
+              <a:rPr lang="ja-JP" altLang="en-US" sz="2000" b="1" dirty="0">
+                <a:solidFill>
+                  <a:srgbClr val="FF0000"/>
+                </a:solidFill>
+              </a:rPr>
+              <a:t>短距離力</a:t>
+            </a:r>
+            <a:r>
+              <a:rPr lang="en-US" altLang="ja-JP" sz="2000" b="1" dirty="0">
+                <a:solidFill>
+                  <a:srgbClr val="FF0000"/>
+                </a:solidFill>
+              </a:rPr>
+              <a:t>)</a:t>
+            </a:r>
+            <a:endParaRPr kumimoji="1" lang="ja-JP" altLang="en-US" sz="2000" b="1" dirty="0">
+              <a:solidFill>
+                <a:srgbClr val="FF0000"/>
+              </a:solidFill>
+            </a:endParaRPr>
+          </a:p>
+        </p:txBody>
+      </p:sp>
+      <p:sp>
+        <p:nvSpPr>
+          <p:cNvPr id="25" name="テキスト ボックス 24">
+            <a:extLst>
+              <a:ext uri="{FF2B5EF4-FFF2-40B4-BE49-F238E27FC236}">
+                <a16:creationId xmlns:a16="http://schemas.microsoft.com/office/drawing/2014/main" id="{44A60EC8-9DB3-E64D-8A13-6A20E4E971D0}"/>
+              </a:ext>
+            </a:extLst>
+          </p:cNvPr>
+          <p:cNvSpPr txBox="1"/>
+          <p:nvPr/>
+        </p:nvSpPr>
+        <p:spPr>
+          <a:xfrm rot="20332948">
+            <a:off x="5339962" y="5491958"/>
+            <a:ext cx="2372381" cy="677108"/>
+          </a:xfrm>
+          <a:prstGeom prst="rect">
+            <a:avLst/>
+          </a:prstGeom>
+          <a:noFill/>
+        </p:spPr>
+        <p:txBody>
+          <a:bodyPr wrap="none" rtlCol="0">
+            <a:spAutoFit/>
+          </a:bodyPr>
+          <a:lstStyle/>
+          <a:p>
+            <a:pPr algn="ctr"/>
+            <a:r>
+              <a:rPr kumimoji="1" lang="en-US" altLang="ja-JP" sz="2000" b="1" dirty="0">
+                <a:solidFill>
+                  <a:srgbClr val="0070C0"/>
+                </a:solidFill>
+              </a:rPr>
+              <a:t>Almost same</a:t>
+            </a:r>
+          </a:p>
+          <a:p>
+            <a:pPr algn="ctr"/>
+            <a:r>
+              <a:rPr lang="en-US" altLang="ja-JP" b="1" dirty="0">
+                <a:solidFill>
+                  <a:srgbClr val="0070C0"/>
+                </a:solidFill>
+              </a:rPr>
+              <a:t>(</a:t>
+            </a:r>
+            <a:r>
+              <a:rPr lang="en-US" altLang="ja-JP" b="1" i="1" dirty="0">
+                <a:solidFill>
+                  <a:srgbClr val="0070C0"/>
+                </a:solidFill>
+              </a:rPr>
+              <a:t>Constraint by </a:t>
+            </a:r>
+            <a:r>
+              <a:rPr lang="en-US" altLang="ja-JP" b="1" baseline="30000" dirty="0">
+                <a:solidFill>
+                  <a:srgbClr val="0070C0"/>
+                </a:solidFill>
+              </a:rPr>
+              <a:t>5</a:t>
+            </a:r>
+            <a:r>
+              <a:rPr lang="en-US" altLang="ja-JP" b="1" baseline="-25000" dirty="0">
+                <a:solidFill>
+                  <a:srgbClr val="0070C0"/>
+                </a:solidFill>
+              </a:rPr>
+              <a:t>Λ</a:t>
+            </a:r>
+            <a:r>
+              <a:rPr lang="en-US" altLang="ja-JP" b="1" dirty="0">
+                <a:solidFill>
+                  <a:srgbClr val="0070C0"/>
+                </a:solidFill>
+              </a:rPr>
+              <a:t>He)</a:t>
+            </a:r>
+            <a:endParaRPr kumimoji="1" lang="ja-JP" altLang="en-US" b="1" dirty="0">
+              <a:solidFill>
+                <a:srgbClr val="0070C0"/>
+              </a:solidFill>
+            </a:endParaRPr>
+          </a:p>
+        </p:txBody>
+      </p:sp>
+      <p:pic>
+        <p:nvPicPr>
+          <p:cNvPr id="26" name="図 25">
+            <a:extLst>
+              <a:ext uri="{FF2B5EF4-FFF2-40B4-BE49-F238E27FC236}">
+                <a16:creationId xmlns:a16="http://schemas.microsoft.com/office/drawing/2014/main" id="{3A16DCFA-B79E-5747-B041-760D780A3991}"/>
+              </a:ext>
+            </a:extLst>
+          </p:cNvPr>
+          <p:cNvPicPr/>
+          <p:nvPr/>
+        </p:nvPicPr>
+        <p:blipFill rotWithShape="1">
+          <a:blip r:embed="rId5">
+            <a:extLst>
+              <a:ext uri="{28A0092B-C50C-407E-A947-70E740481C1C}">
+                <a14:useLocalDpi xmlns:a14="http://schemas.microsoft.com/office/drawing/2010/main" val="0"/>
+              </a:ext>
+            </a:extLst>
+          </a:blip>
+          <a:srcRect l="75269" t="41937" b="30547"/>
+          <a:stretch/>
+        </p:blipFill>
+        <p:spPr bwMode="auto">
+          <a:xfrm>
+            <a:off x="8949729" y="2432555"/>
+            <a:ext cx="3153059" cy="1629237"/>
+          </a:xfrm>
+          <a:prstGeom prst="rect">
+            <a:avLst/>
+          </a:prstGeom>
+          <a:noFill/>
+          <a:ln>
+            <a:noFill/>
+          </a:ln>
+        </p:spPr>
+      </p:pic>
+      <p:sp>
+        <p:nvSpPr>
+          <p:cNvPr id="27" name="テキスト ボックス 26">
+            <a:extLst>
+              <a:ext uri="{FF2B5EF4-FFF2-40B4-BE49-F238E27FC236}">
+                <a16:creationId xmlns:a16="http://schemas.microsoft.com/office/drawing/2014/main" id="{52374C93-E720-F64C-8F19-4B86980165A5}"/>
+              </a:ext>
+            </a:extLst>
+          </p:cNvPr>
+          <p:cNvSpPr txBox="1"/>
+          <p:nvPr/>
+        </p:nvSpPr>
+        <p:spPr>
+          <a:xfrm>
+            <a:off x="10896136" y="1848312"/>
+            <a:ext cx="1114408" cy="646331"/>
+          </a:xfrm>
+          <a:prstGeom prst="rect">
+            <a:avLst/>
+          </a:prstGeom>
+          <a:noFill/>
+        </p:spPr>
+        <p:txBody>
+          <a:bodyPr wrap="none" rtlCol="0">
+            <a:spAutoFit/>
+          </a:bodyPr>
+          <a:lstStyle/>
+          <a:p>
+            <a:pPr algn="ctr"/>
+            <a:r>
+              <a:rPr lang="en-US" altLang="ja-JP" b="1" dirty="0">
+                <a:solidFill>
+                  <a:srgbClr val="FF0000"/>
+                </a:solidFill>
+              </a:rPr>
+              <a:t>ΛN</a:t>
+            </a:r>
+          </a:p>
+          <a:p>
+            <a:pPr algn="ctr"/>
+            <a:r>
+              <a:rPr kumimoji="1" lang="ja-JP" altLang="en-US" b="1">
+                <a:solidFill>
+                  <a:srgbClr val="FF0000"/>
+                </a:solidFill>
+              </a:rPr>
+              <a:t>短距離力</a:t>
+            </a:r>
+          </a:p>
+        </p:txBody>
+      </p:sp>
+      <p:sp>
+        <p:nvSpPr>
+          <p:cNvPr id="28" name="テキスト ボックス 27">
+            <a:extLst>
+              <a:ext uri="{FF2B5EF4-FFF2-40B4-BE49-F238E27FC236}">
+                <a16:creationId xmlns:a16="http://schemas.microsoft.com/office/drawing/2014/main" id="{9AF93D4D-5EF5-9C45-9C52-3B31C0F2C0CC}"/>
+              </a:ext>
+            </a:extLst>
+          </p:cNvPr>
+          <p:cNvSpPr txBox="1"/>
+          <p:nvPr/>
+        </p:nvSpPr>
+        <p:spPr>
+          <a:xfrm>
+            <a:off x="8879894" y="1853310"/>
+            <a:ext cx="1579278" cy="646331"/>
+          </a:xfrm>
+          <a:prstGeom prst="rect">
+            <a:avLst/>
+          </a:prstGeom>
+          <a:noFill/>
+        </p:spPr>
+        <p:txBody>
+          <a:bodyPr wrap="none" rtlCol="0">
+            <a:spAutoFit/>
+          </a:bodyPr>
+          <a:lstStyle/>
+          <a:p>
+            <a:pPr algn="ctr"/>
+            <a:r>
+              <a:rPr kumimoji="1" lang="ja-JP" altLang="en-US" b="1">
+                <a:solidFill>
+                  <a:srgbClr val="FF0000"/>
+                </a:solidFill>
+              </a:rPr>
+              <a:t>高密度化での</a:t>
+            </a:r>
+            <a:endParaRPr kumimoji="1" lang="en-US" altLang="ja-JP" b="1" dirty="0">
+              <a:solidFill>
+                <a:srgbClr val="FF0000"/>
+              </a:solidFill>
+            </a:endParaRPr>
+          </a:p>
+          <a:p>
+            <a:pPr algn="ctr"/>
+            <a:r>
+              <a:rPr lang="en-US" altLang="ja-JP" b="1" dirty="0">
+                <a:solidFill>
+                  <a:srgbClr val="FF0000"/>
+                </a:solidFill>
+              </a:rPr>
+              <a:t>ΛN</a:t>
+            </a:r>
+            <a:r>
+              <a:rPr lang="ja-JP" altLang="en-US" b="1">
+                <a:solidFill>
+                  <a:srgbClr val="FF0000"/>
+                </a:solidFill>
+              </a:rPr>
+              <a:t>相互作用</a:t>
+            </a:r>
+            <a:endParaRPr kumimoji="1" lang="ja-JP" altLang="en-US" b="1">
+              <a:solidFill>
+                <a:srgbClr val="FF0000"/>
+              </a:solidFill>
+            </a:endParaRPr>
+          </a:p>
+        </p:txBody>
+      </p:sp>
+      <p:cxnSp>
+        <p:nvCxnSpPr>
+          <p:cNvPr id="30" name="直線矢印コネクタ 29">
+            <a:extLst>
+              <a:ext uri="{FF2B5EF4-FFF2-40B4-BE49-F238E27FC236}">
+                <a16:creationId xmlns:a16="http://schemas.microsoft.com/office/drawing/2014/main" id="{59B79C81-F71C-1143-BC8D-F020C1B903E4}"/>
+              </a:ext>
+            </a:extLst>
+          </p:cNvPr>
+          <p:cNvCxnSpPr>
+            <a:cxnSpLocks/>
+          </p:cNvCxnSpPr>
+          <p:nvPr/>
+        </p:nvCxnSpPr>
+        <p:spPr>
+          <a:xfrm>
+            <a:off x="8404016" y="2423443"/>
+            <a:ext cx="1289587" cy="655443"/>
+          </a:xfrm>
+          <a:prstGeom prst="straightConnector1">
+            <a:avLst/>
+          </a:prstGeom>
+          <a:ln>
+            <a:tailEnd type="triangle"/>
+          </a:ln>
+        </p:spPr>
+        <p:style>
+          <a:lnRef idx="1">
+            <a:schemeClr val="accent1"/>
+          </a:lnRef>
+          <a:fillRef idx="0">
+            <a:schemeClr val="accent1"/>
+          </a:fillRef>
+          <a:effectRef idx="0">
+            <a:schemeClr val="accent1"/>
+          </a:effectRef>
+          <a:fontRef idx="minor">
+            <a:schemeClr val="tx1"/>
+          </a:fontRef>
+        </p:style>
+      </p:cxnSp>
+      <p:cxnSp>
+        <p:nvCxnSpPr>
+          <p:cNvPr id="33" name="直線矢印コネクタ 32">
+            <a:extLst>
+              <a:ext uri="{FF2B5EF4-FFF2-40B4-BE49-F238E27FC236}">
+                <a16:creationId xmlns:a16="http://schemas.microsoft.com/office/drawing/2014/main" id="{375E9D12-4C7D-824D-9F55-4E2AD70305A7}"/>
+              </a:ext>
+            </a:extLst>
+          </p:cNvPr>
+          <p:cNvCxnSpPr>
+            <a:cxnSpLocks/>
+          </p:cNvCxnSpPr>
+          <p:nvPr/>
+        </p:nvCxnSpPr>
+        <p:spPr>
+          <a:xfrm>
+            <a:off x="8404016" y="2418041"/>
+            <a:ext cx="2579174" cy="461631"/>
+          </a:xfrm>
+          <a:prstGeom prst="straightConnector1">
+            <a:avLst/>
+          </a:prstGeom>
+          <a:ln>
+            <a:tailEnd type="triangle"/>
+          </a:ln>
+        </p:spPr>
+        <p:style>
+          <a:lnRef idx="1">
+            <a:schemeClr val="accent1"/>
+          </a:lnRef>
+          <a:fillRef idx="0">
+            <a:schemeClr val="accent1"/>
+          </a:fillRef>
+          <a:effectRef idx="0">
+            <a:schemeClr val="accent1"/>
+          </a:effectRef>
+          <a:fontRef idx="minor">
+            <a:schemeClr val="tx1"/>
+          </a:fontRef>
+        </p:style>
+      </p:cxnSp>
+      <p:sp>
+        <p:nvSpPr>
+          <p:cNvPr id="5" name="テキスト ボックス 4">
+            <a:extLst>
+              <a:ext uri="{FF2B5EF4-FFF2-40B4-BE49-F238E27FC236}">
+                <a16:creationId xmlns:a16="http://schemas.microsoft.com/office/drawing/2014/main" id="{FAC06F2A-E715-3D4B-8BA5-A40361E7224F}"/>
+              </a:ext>
+            </a:extLst>
+          </p:cNvPr>
+          <p:cNvSpPr txBox="1"/>
+          <p:nvPr/>
+        </p:nvSpPr>
+        <p:spPr>
+          <a:xfrm>
+            <a:off x="8883926" y="5189359"/>
+            <a:ext cx="3118161" cy="1200329"/>
+          </a:xfrm>
+          <a:prstGeom prst="rect">
+            <a:avLst/>
+          </a:prstGeom>
+          <a:noFill/>
+        </p:spPr>
+        <p:txBody>
+          <a:bodyPr wrap="none" rtlCol="0">
+            <a:spAutoFit/>
+          </a:bodyPr>
+          <a:lstStyle/>
+          <a:p>
+            <a:pPr algn="ctr"/>
+            <a:r>
+              <a:rPr kumimoji="1" lang="en-US" altLang="ja-JP" sz="2400" b="1" dirty="0">
+                <a:solidFill>
+                  <a:srgbClr val="00B050"/>
+                </a:solidFill>
+              </a:rPr>
+              <a:t>HYPS / J-PARC E86</a:t>
+            </a:r>
+          </a:p>
+          <a:p>
+            <a:pPr algn="ctr"/>
+            <a:r>
+              <a:rPr lang="en-US" altLang="ja-JP" sz="2400" b="1" dirty="0" err="1">
+                <a:solidFill>
+                  <a:srgbClr val="00B050"/>
+                </a:solidFill>
+              </a:rPr>
+              <a:t>Λp</a:t>
+            </a:r>
+            <a:r>
+              <a:rPr lang="ja-JP" altLang="en-US" sz="2400" b="1" dirty="0">
+                <a:solidFill>
+                  <a:srgbClr val="00B050"/>
+                </a:solidFill>
+              </a:rPr>
+              <a:t>散乱</a:t>
+            </a:r>
+            <a:r>
+              <a:rPr lang="en-US" altLang="ja-JP" sz="2400" b="1" dirty="0">
+                <a:solidFill>
+                  <a:srgbClr val="00B050"/>
+                </a:solidFill>
+              </a:rPr>
+              <a:t> </a:t>
+            </a:r>
+          </a:p>
+          <a:p>
+            <a:pPr algn="ctr"/>
+            <a:r>
+              <a:rPr kumimoji="1" lang="en-US" altLang="ja-JP" sz="2400" b="1" dirty="0">
+                <a:solidFill>
+                  <a:srgbClr val="00B050"/>
+                </a:solidFill>
+              </a:rPr>
+              <a:t>at p = 0.4 – 0.8 GeV/c</a:t>
+            </a:r>
+            <a:endParaRPr kumimoji="1" lang="ja-JP" altLang="en-US" sz="2400" b="1" dirty="0">
+              <a:solidFill>
+                <a:srgbClr val="00B050"/>
+              </a:solidFill>
+            </a:endParaRPr>
+          </a:p>
+        </p:txBody>
+      </p:sp>
+      <p:cxnSp>
+        <p:nvCxnSpPr>
+          <p:cNvPr id="29" name="直線矢印コネクタ 28">
+            <a:extLst>
+              <a:ext uri="{FF2B5EF4-FFF2-40B4-BE49-F238E27FC236}">
+                <a16:creationId xmlns:a16="http://schemas.microsoft.com/office/drawing/2014/main" id="{4D839CBB-1C79-284B-A3E3-7D6A181702F2}"/>
+              </a:ext>
+            </a:extLst>
+          </p:cNvPr>
+          <p:cNvCxnSpPr>
+            <a:cxnSpLocks/>
+            <a:stCxn id="5" idx="0"/>
+          </p:cNvCxnSpPr>
+          <p:nvPr/>
+        </p:nvCxnSpPr>
+        <p:spPr>
+          <a:xfrm flipV="1">
+            <a:off x="10443007" y="3685456"/>
+            <a:ext cx="892650" cy="1503903"/>
+          </a:xfrm>
+          <a:prstGeom prst="straightConnector1">
+            <a:avLst/>
+          </a:prstGeom>
+          <a:ln>
+            <a:tailEnd type="triangle"/>
+          </a:ln>
+        </p:spPr>
+        <p:style>
+          <a:lnRef idx="1">
+            <a:schemeClr val="accent1"/>
+          </a:lnRef>
+          <a:fillRef idx="0">
+            <a:schemeClr val="accent1"/>
+          </a:fillRef>
+          <a:effectRef idx="0">
+            <a:schemeClr val="accent1"/>
+          </a:effectRef>
+          <a:fontRef idx="minor">
+            <a:schemeClr val="tx1"/>
+          </a:fontRef>
+        </p:style>
+      </p:cxnSp>
+      <p:sp>
+        <p:nvSpPr>
+          <p:cNvPr id="23" name="テキスト ボックス 22">
+            <a:extLst>
+              <a:ext uri="{FF2B5EF4-FFF2-40B4-BE49-F238E27FC236}">
+                <a16:creationId xmlns:a16="http://schemas.microsoft.com/office/drawing/2014/main" id="{C1C0E602-CF62-F34F-960E-F61C1D5E5CD3}"/>
+              </a:ext>
+            </a:extLst>
+          </p:cNvPr>
+          <p:cNvSpPr txBox="1"/>
+          <p:nvPr/>
+        </p:nvSpPr>
+        <p:spPr>
+          <a:xfrm>
+            <a:off x="8945001" y="961820"/>
+            <a:ext cx="2969083" cy="830997"/>
+          </a:xfrm>
+          <a:prstGeom prst="rect">
+            <a:avLst/>
+          </a:prstGeom>
+          <a:noFill/>
+        </p:spPr>
+        <p:txBody>
+          <a:bodyPr wrap="none" rtlCol="0">
+            <a:spAutoFit/>
+          </a:bodyPr>
+          <a:lstStyle/>
+          <a:p>
+            <a:pPr algn="ctr"/>
+            <a:r>
+              <a:rPr lang="ja-JP" altLang="en-US" sz="2400" b="1" i="1" dirty="0">
+                <a:solidFill>
+                  <a:srgbClr val="00B0F0"/>
+                </a:solidFill>
+              </a:rPr>
+              <a:t>ハイペロンパズルを</a:t>
+            </a:r>
+            <a:endParaRPr lang="en-US" altLang="ja-JP" sz="2400" b="1" i="1" dirty="0">
+              <a:solidFill>
+                <a:srgbClr val="00B0F0"/>
+              </a:solidFill>
+            </a:endParaRPr>
+          </a:p>
+          <a:p>
+            <a:pPr algn="ctr"/>
+            <a:r>
+              <a:rPr kumimoji="1" lang="ja-JP" altLang="en-US" sz="2400" b="1" i="1" dirty="0">
+                <a:solidFill>
+                  <a:srgbClr val="00B0F0"/>
+                </a:solidFill>
+              </a:rPr>
+              <a:t>解く鍵</a:t>
+            </a:r>
+          </a:p>
+        </p:txBody>
+      </p:sp>
+      <p:sp>
+        <p:nvSpPr>
+          <p:cNvPr id="32" name="タイトル 1">
+            <a:extLst>
+              <a:ext uri="{FF2B5EF4-FFF2-40B4-BE49-F238E27FC236}">
+                <a16:creationId xmlns:a16="http://schemas.microsoft.com/office/drawing/2014/main" id="{C1F4CEC7-8122-7644-BB9A-63D7F7F66A68}"/>
+              </a:ext>
+            </a:extLst>
+          </p:cNvPr>
+          <p:cNvSpPr txBox="1">
+            <a:spLocks/>
+          </p:cNvSpPr>
+          <p:nvPr/>
+        </p:nvSpPr>
+        <p:spPr>
+          <a:xfrm>
+            <a:off x="188685" y="219389"/>
+            <a:ext cx="11814629" cy="532320"/>
+          </a:xfrm>
+          <a:prstGeom prst="rect">
+            <a:avLst/>
+          </a:prstGeom>
+          <a:solidFill>
+            <a:schemeClr val="bg1"/>
+          </a:solidFill>
+        </p:spPr>
+        <p:txBody>
+          <a:bodyPr vert="horz" lIns="91440" tIns="45720" rIns="91440" bIns="45720" rtlCol="0" anchor="t">
+            <a:normAutofit fontScale="85000" lnSpcReduction="20000"/>
+          </a:bodyPr>
+          <a:lstStyle>
+            <a:lvl1pPr algn="l" defTabSz="914400" rtl="0" eaLnBrk="1" latinLnBrk="0" hangingPunct="1">
+              <a:lnSpc>
+                <a:spcPct val="85000"/>
+              </a:lnSpc>
+              <a:spcBef>
+                <a:spcPct val="0"/>
+              </a:spcBef>
+              <a:buNone/>
+              <a:defRPr sz="4400" b="1" kern="1200" cap="none" baseline="0">
+                <a:solidFill>
+                  <a:schemeClr val="tx1"/>
+                </a:solidFill>
+                <a:latin typeface="+mj-lt"/>
+                <a:ea typeface="+mj-ea"/>
+                <a:cs typeface="+mj-cs"/>
+              </a:defRPr>
+            </a:lvl1pPr>
+          </a:lstStyle>
+          <a:p>
+            <a:pPr algn="ctr"/>
+            <a:r>
+              <a:rPr kumimoji="1" lang="en-US" altLang="ja-JP" dirty="0"/>
+              <a:t>E88</a:t>
+            </a:r>
+            <a:r>
+              <a:rPr kumimoji="1" lang="ja-JP" altLang="en-US"/>
+              <a:t>バイプロ</a:t>
+            </a:r>
+            <a:r>
+              <a:rPr kumimoji="1" lang="en-US" altLang="ja-JP" dirty="0"/>
+              <a:t>: </a:t>
+            </a:r>
+            <a:r>
+              <a:rPr kumimoji="1" lang="en-US" altLang="ja-JP" dirty="0" err="1"/>
+              <a:t>pA</a:t>
+            </a:r>
+            <a:r>
+              <a:rPr kumimoji="1" lang="ja-JP" altLang="en-US"/>
+              <a:t>衝突による</a:t>
+            </a:r>
+            <a:r>
+              <a:rPr kumimoji="1" lang="en-US" altLang="ja-JP" dirty="0">
+                <a:solidFill>
+                  <a:srgbClr val="FF0000"/>
+                </a:solidFill>
+              </a:rPr>
+              <a:t>α</a:t>
+            </a:r>
+            <a:r>
+              <a:rPr kumimoji="1" lang="en-US" altLang="ja-JP" dirty="0" err="1">
+                <a:solidFill>
+                  <a:srgbClr val="FF0000"/>
+                </a:solidFill>
+              </a:rPr>
+              <a:t>Λ</a:t>
+            </a:r>
+            <a:r>
+              <a:rPr kumimoji="1" lang="en-US" altLang="ja-JP" dirty="0"/>
+              <a:t> </a:t>
+            </a:r>
+            <a:r>
+              <a:rPr kumimoji="1" lang="en-US" altLang="ja-JP" dirty="0" err="1"/>
+              <a:t>Femtoscopy</a:t>
+            </a:r>
+            <a:endParaRPr kumimoji="1" lang="ja-JP" altLang="en-US"/>
+          </a:p>
+        </p:txBody>
+      </p:sp>
+      <p:sp>
+        <p:nvSpPr>
+          <p:cNvPr id="2" name="楕円 1">
+            <a:extLst>
+              <a:ext uri="{FF2B5EF4-FFF2-40B4-BE49-F238E27FC236}">
+                <a16:creationId xmlns:a16="http://schemas.microsoft.com/office/drawing/2014/main" id="{A17790AC-D37B-0A93-1748-E2C93572159E}"/>
+              </a:ext>
+            </a:extLst>
+          </p:cNvPr>
+          <p:cNvSpPr/>
+          <p:nvPr/>
+        </p:nvSpPr>
+        <p:spPr>
+          <a:xfrm>
+            <a:off x="439750" y="1577538"/>
+            <a:ext cx="742710" cy="2347251"/>
+          </a:xfrm>
+          <a:prstGeom prst="ellipse">
+            <a:avLst/>
+          </a:prstGeom>
+          <a:noFill/>
+          <a:ln>
+            <a:solidFill>
+              <a:srgbClr val="FF0000"/>
+            </a:solidFill>
+          </a:ln>
+        </p:spPr>
+        <p:style>
+          <a:lnRef idx="2">
+            <a:schemeClr val="accent1">
+              <a:shade val="15000"/>
+            </a:schemeClr>
+          </a:lnRef>
+          <a:fillRef idx="1">
+            <a:schemeClr val="accent1"/>
+          </a:fillRef>
+          <a:effectRef idx="0">
+            <a:schemeClr val="accent1"/>
+          </a:effectRef>
+          <a:fontRef idx="minor">
+            <a:schemeClr val="lt1"/>
+          </a:fontRef>
+        </p:style>
+        <p:txBody>
+          <a:bodyPr rtlCol="0" anchor="ctr"/>
+          <a:lstStyle/>
+          <a:p>
+            <a:pPr algn="ctr"/>
+            <a:endParaRPr kumimoji="1" lang="ja-JP" altLang="en-US">
+              <a:noFill/>
+            </a:endParaRPr>
+          </a:p>
+        </p:txBody>
+      </p:sp>
+      <p:sp>
+        <p:nvSpPr>
+          <p:cNvPr id="12" name="楕円 11">
+            <a:extLst>
+              <a:ext uri="{FF2B5EF4-FFF2-40B4-BE49-F238E27FC236}">
+                <a16:creationId xmlns:a16="http://schemas.microsoft.com/office/drawing/2014/main" id="{28E0B085-1BEA-42E2-BD1E-5ED0C0096B73}"/>
+              </a:ext>
+            </a:extLst>
+          </p:cNvPr>
+          <p:cNvSpPr/>
+          <p:nvPr/>
+        </p:nvSpPr>
+        <p:spPr>
+          <a:xfrm>
+            <a:off x="5356615" y="1263767"/>
+            <a:ext cx="2370811" cy="1021098"/>
+          </a:xfrm>
+          <a:prstGeom prst="ellipse">
+            <a:avLst/>
+          </a:prstGeom>
+          <a:noFill/>
+          <a:ln>
+            <a:solidFill>
+              <a:srgbClr val="FF0000"/>
+            </a:solidFill>
+          </a:ln>
+        </p:spPr>
+        <p:style>
+          <a:lnRef idx="2">
+            <a:schemeClr val="accent1">
+              <a:shade val="15000"/>
+            </a:schemeClr>
+          </a:lnRef>
+          <a:fillRef idx="1">
+            <a:schemeClr val="accent1"/>
+          </a:fillRef>
+          <a:effectRef idx="0">
+            <a:schemeClr val="accent1"/>
+          </a:effectRef>
+          <a:fontRef idx="minor">
+            <a:schemeClr val="lt1"/>
+          </a:fontRef>
+        </p:style>
+        <p:txBody>
+          <a:bodyPr rtlCol="0" anchor="ctr"/>
+          <a:lstStyle/>
+          <a:p>
+            <a:pPr algn="ctr"/>
+            <a:endParaRPr kumimoji="1" lang="ja-JP" altLang="en-US">
+              <a:noFill/>
+            </a:endParaRPr>
+          </a:p>
+        </p:txBody>
+      </p:sp>
+      <p:sp>
+        <p:nvSpPr>
+          <p:cNvPr id="14" name="テキスト ボックス 13">
+            <a:extLst>
+              <a:ext uri="{FF2B5EF4-FFF2-40B4-BE49-F238E27FC236}">
+                <a16:creationId xmlns:a16="http://schemas.microsoft.com/office/drawing/2014/main" id="{391BE042-6E0A-B7CC-C728-CAB7108B3560}"/>
+              </a:ext>
+            </a:extLst>
+          </p:cNvPr>
+          <p:cNvSpPr txBox="1"/>
+          <p:nvPr/>
+        </p:nvSpPr>
+        <p:spPr>
+          <a:xfrm rot="21141440">
+            <a:off x="3476977" y="940309"/>
+            <a:ext cx="1800493" cy="1200329"/>
+          </a:xfrm>
+          <a:prstGeom prst="rect">
+            <a:avLst/>
+          </a:prstGeom>
+          <a:noFill/>
+        </p:spPr>
+        <p:txBody>
+          <a:bodyPr wrap="none" rtlCol="0">
+            <a:spAutoFit/>
+          </a:bodyPr>
+          <a:lstStyle/>
+          <a:p>
+            <a:pPr algn="ctr"/>
+            <a:r>
+              <a:rPr kumimoji="1" lang="en-US" altLang="ja-JP" b="1" i="1" dirty="0">
+                <a:solidFill>
+                  <a:srgbClr val="FF0000"/>
+                </a:solidFill>
+              </a:rPr>
+              <a:t>αΛ</a:t>
+            </a:r>
+            <a:br>
+              <a:rPr kumimoji="1" lang="en-US" altLang="ja-JP" b="1" i="1" dirty="0">
+                <a:solidFill>
+                  <a:srgbClr val="FF0000"/>
+                </a:solidFill>
+              </a:rPr>
+            </a:br>
+            <a:r>
+              <a:rPr lang="ja-JP" altLang="en-US" b="1" i="1" dirty="0">
+                <a:solidFill>
+                  <a:srgbClr val="FF0000"/>
+                </a:solidFill>
+              </a:rPr>
+              <a:t>ポテンシャルの</a:t>
+            </a:r>
+            <a:endParaRPr lang="en-US" altLang="ja-JP" b="1" i="1" dirty="0">
+              <a:solidFill>
+                <a:srgbClr val="FF0000"/>
+              </a:solidFill>
+            </a:endParaRPr>
+          </a:p>
+          <a:p>
+            <a:pPr algn="ctr"/>
+            <a:r>
+              <a:rPr kumimoji="1" lang="ja-JP" altLang="en-US" b="1" i="1" dirty="0">
+                <a:solidFill>
+                  <a:srgbClr val="FF0000"/>
+                </a:solidFill>
+              </a:rPr>
+              <a:t>短距離成分に</a:t>
+            </a:r>
+            <a:endParaRPr kumimoji="1" lang="en-US" altLang="ja-JP" b="1" i="1" dirty="0">
+              <a:solidFill>
+                <a:srgbClr val="FF0000"/>
+              </a:solidFill>
+            </a:endParaRPr>
+          </a:p>
+          <a:p>
+            <a:pPr algn="ctr"/>
+            <a:r>
+              <a:rPr kumimoji="1" lang="ja-JP" altLang="en-US" b="1" i="1" dirty="0">
+                <a:solidFill>
+                  <a:srgbClr val="FF0000"/>
+                </a:solidFill>
+              </a:rPr>
+              <a:t>敏感！</a:t>
+            </a:r>
+          </a:p>
+        </p:txBody>
+      </p:sp>
+      <p:cxnSp>
+        <p:nvCxnSpPr>
+          <p:cNvPr id="31" name="直線矢印コネクタ 30">
+            <a:extLst>
+              <a:ext uri="{FF2B5EF4-FFF2-40B4-BE49-F238E27FC236}">
+                <a16:creationId xmlns:a16="http://schemas.microsoft.com/office/drawing/2014/main" id="{801BBB2D-2B5E-3A2D-43F7-351808209ED2}"/>
+              </a:ext>
+            </a:extLst>
+          </p:cNvPr>
+          <p:cNvCxnSpPr>
+            <a:cxnSpLocks/>
+          </p:cNvCxnSpPr>
+          <p:nvPr/>
+        </p:nvCxnSpPr>
+        <p:spPr>
+          <a:xfrm flipV="1">
+            <a:off x="1296365" y="1925436"/>
+            <a:ext cx="4001282" cy="569207"/>
+          </a:xfrm>
+          <a:prstGeom prst="straightConnector1">
+            <a:avLst/>
+          </a:prstGeom>
+          <a:ln>
+            <a:solidFill>
+              <a:srgbClr val="FF0000"/>
+            </a:solidFill>
+            <a:headEnd type="triangle"/>
+            <a:tailEnd type="triangle"/>
+          </a:ln>
+        </p:spPr>
+        <p:style>
+          <a:lnRef idx="1">
+            <a:schemeClr val="accent1"/>
+          </a:lnRef>
+          <a:fillRef idx="0">
+            <a:schemeClr val="accent1"/>
+          </a:fillRef>
+          <a:effectRef idx="0">
+            <a:schemeClr val="accent1"/>
+          </a:effectRef>
+          <a:fontRef idx="minor">
+            <a:schemeClr val="tx1"/>
+          </a:fontRef>
+        </p:style>
+      </p:cxnSp>
+    </p:spTree>
+    <p:extLst>
+      <p:ext uri="{BB962C8B-B14F-4D97-AF65-F5344CB8AC3E}">
+        <p14:creationId xmlns:p14="http://schemas.microsoft.com/office/powerpoint/2010/main" val="3331772448"/>
       </p:ext>
     </p:extLst>
   </p:cSld>
